--- a/assignments/CMPE295A_InsightPilot_Project_Formation.pptx
+++ b/assignments/CMPE295A_InsightPilot_Project_Formation.pptx
@@ -520,6 +520,11 @@
         </p:txBody>
       </p:sp>
     </p:spTree>
+    <p:extLst>
+      <p:ext uri="{BB962C8B-B14F-4D97-AF65-F5344CB8AC3E}">
+        <p14:creationId xmlns:p14="http://schemas.microsoft.com/office/powerpoint/2010/main" val="1"/>
+      </p:ext>
+    </p:extLst>
   </p:cSld>
   <p:clrMap bg1="lt1" tx1="dk1" bg2="lt2" tx2="dk2" accent1="accent1" accent2="accent2" accent3="accent3" accent4="accent4" accent5="accent5" accent6="accent6" hlink="hlink" folHlink="folHlink"/>
 </p:handoutMaster>
@@ -718,7 +723,7 @@
             </a:extLst>
           </p:cNvPr>
           <p:cNvSpPr>
-            <a:spLocks noChangeArrowheads="1" noTextEdit="1"/>
+            <a:spLocks noGrp="1" noRot="1" noChangeAspect="1" noChangeArrowheads="1" noTextEdit="1"/>
           </p:cNvSpPr>
           <p:nvPr>
             <p:ph type="sldImg" idx="2"/>
@@ -1315,7 +1320,7 @@
             </a:extLst>
           </p:cNvPr>
           <p:cNvSpPr>
-            <a:spLocks noChangeArrowheads="1" noTextEdit="1"/>
+            <a:spLocks noGrp="1" noRot="1" noChangeAspect="1" noChangeArrowheads="1" noTextEdit="1"/>
           </p:cNvSpPr>
           <p:nvPr>
             <p:ph type="sldImg"/>
@@ -1520,7 +1525,7 @@
             </a:extLst>
           </p:cNvPr>
           <p:cNvSpPr>
-            <a:spLocks noChangeArrowheads="1" noTextEdit="1"/>
+            <a:spLocks noGrp="1" noRot="1" noChangeAspect="1" noChangeArrowheads="1" noTextEdit="1"/>
           </p:cNvSpPr>
           <p:nvPr>
             <p:ph type="sldImg"/>
@@ -1725,7 +1730,7 @@
             </a:extLst>
           </p:cNvPr>
           <p:cNvSpPr>
-            <a:spLocks noChangeArrowheads="1" noTextEdit="1"/>
+            <a:spLocks noGrp="1" noRot="1" noChangeAspect="1" noChangeArrowheads="1" noTextEdit="1"/>
           </p:cNvSpPr>
           <p:nvPr>
             <p:ph type="sldImg"/>
@@ -1930,7 +1935,7 @@
             </a:extLst>
           </p:cNvPr>
           <p:cNvSpPr>
-            <a:spLocks noChangeArrowheads="1" noTextEdit="1"/>
+            <a:spLocks noGrp="1" noRot="1" noChangeAspect="1" noChangeArrowheads="1" noTextEdit="1"/>
           </p:cNvSpPr>
           <p:nvPr>
             <p:ph type="sldImg"/>
@@ -7888,28 +7893,32 @@
         </p:spPr>
         <p:txBody>
           <a:bodyPr>
-            <a:normAutofit/>
+            <a:normAutofit fontScale="90000"/>
           </a:bodyPr>
           <a:lstStyle/>
           <a:p>
             <a:pPr eaLnBrk="1" hangingPunct="1"/>
             <a:br>
-              <a:rPr lang="en-US" altLang="en-US"/>
+              <a:rPr lang="en-US" altLang="en-US" dirty="0"/>
             </a:br>
             <a:br>
-              <a:rPr lang="en-US" altLang="en-US"/>
+              <a:rPr lang="en-US" altLang="en-US" dirty="0"/>
             </a:br>
             <a:br>
-              <a:rPr lang="en-US" altLang="en-US"/>
+              <a:rPr lang="en-US" altLang="en-US" dirty="0"/>
             </a:br>
             <a:r>
-              <a:rPr lang="en-US" altLang="en-US" sz="3600"/>
-              <a:t>InsightPilot: An Agentic Platform for Conversational Business Intelligence</a:t>
+              <a:rPr lang="en-US" altLang="en-US" sz="3600" dirty="0" err="1"/>
+              <a:t>InsightPilot</a:t>
+            </a:r>
+            <a:r>
+              <a:rPr lang="en-US" altLang="en-US" sz="3600" dirty="0"/>
+              <a:t>: An Agentic Platform for Conversational Business Intelligence</a:t>
             </a:r>
             <a:br>
-              <a:rPr lang="en-US" altLang="en-US"/>
+              <a:rPr lang="en-US" altLang="en-US" dirty="0"/>
             </a:br>
-            <a:endParaRPr lang="en-US" altLang="en-US" sz="1800"/>
+            <a:endParaRPr lang="en-US" altLang="en-US" sz="1800" dirty="0"/>
           </a:p>
         </p:txBody>
       </p:sp>
@@ -7951,29 +7960,34 @@
             <a:pPr algn="l" eaLnBrk="1" hangingPunct="1"/>
             <a:r>
               <a:rPr lang="en-US" altLang="en-US" sz="2400" dirty="0"/>
-              <a:t>Team Members: [Name] - Orchestration &amp; Planning</a:t>
+              <a:t>Team Members: Akshay Sunil Navani</a:t>
             </a:r>
           </a:p>
           <a:p>
             <a:pPr algn="l" eaLnBrk="1" hangingPunct="1"/>
             <a:r>
               <a:rPr lang="en-US" altLang="en-US" sz="2400" dirty="0"/>
-              <a:t>                        [Name] - Data Integration &amp; Connectors</a:t>
+              <a:t>                        Atharva Nitin Kulkarni</a:t>
             </a:r>
           </a:p>
           <a:p>
             <a:pPr algn="l" eaLnBrk="1" hangingPunct="1"/>
             <a:r>
               <a:rPr lang="en-US" altLang="en-US" sz="2400" dirty="0"/>
-              <a:t>                        [Name] - Verification &amp; Lineage</a:t>
+              <a:t>                        Pranjal Shrivastava</a:t>
             </a:r>
             <a:br>
               <a:rPr lang="en-US" altLang="en-US" sz="2400" dirty="0"/>
             </a:br>
             <a:r>
               <a:rPr lang="en-US" altLang="en-US" sz="2400" dirty="0"/>
-              <a:t>                        [Name] - Analytics, ML &amp; Evaluation</a:t>
-            </a:r>
+              <a:t>                        Shantanu </a:t>
+            </a:r>
+            <a:r>
+              <a:rPr lang="en-US" altLang="en-US" sz="2400" dirty="0" err="1"/>
+              <a:t>Zadbuke</a:t>
+            </a:r>
+            <a:endParaRPr lang="en-US" altLang="en-US" sz="2400" dirty="0"/>
           </a:p>
           <a:p>
             <a:pPr algn="l" eaLnBrk="1" hangingPunct="1"/>
@@ -7982,8 +7996,8 @@
               <a:t>Methodology:     Development</a:t>
             </a:r>
             <a:r>
-              <a:rPr lang="en-US" altLang="en-US" dirty="0"/>
-              <a:t>	 			   </a:t>
+              <a:rPr lang="en-US" altLang="en-US" sz="1800" dirty="0"/>
+              <a:t>	   </a:t>
             </a:r>
           </a:p>
         </p:txBody>
@@ -8058,10 +8072,15 @@
             <p:ph type="body" idx="1"/>
           </p:nvPr>
         </p:nvSpPr>
-        <p:spPr/>
+        <p:spPr>
+          <a:xfrm>
+            <a:off x="1182688" y="2017712"/>
+            <a:ext cx="7772400" cy="4383088"/>
+          </a:xfrm>
+        </p:spPr>
         <p:txBody>
           <a:bodyPr>
-            <a:normAutofit fontScale="92500" lnSpcReduction="10000"/>
+            <a:noAutofit/>
           </a:bodyPr>
           <a:lstStyle/>
           <a:p>
@@ -8069,7 +8088,7 @@
               <a:defRPr/>
             </a:pPr>
             <a:r>
-              <a:rPr lang="en-US" altLang="en-US" dirty="0"/>
+              <a:rPr lang="en-US" altLang="en-US" sz="2200" dirty="0"/>
               <a:t>Enterprise analysts answer unanticipated questions by hand, locating sources, inspecting schemas and writing queries</a:t>
             </a:r>
           </a:p>
@@ -8078,7 +8097,7 @@
               <a:defRPr/>
             </a:pPr>
             <a:r>
-              <a:rPr lang="en-US" altLang="en-US" dirty="0"/>
+              <a:rPr lang="en-US" altLang="en-US" sz="2200" dirty="0"/>
               <a:t>Existing BI assistants are confined to a single pre-defined warehouse and cannot span multiple systems</a:t>
             </a:r>
           </a:p>
@@ -8087,7 +8106,7 @@
               <a:defRPr/>
             </a:pPr>
             <a:r>
-              <a:rPr lang="en-US" altLang="en-US" dirty="0"/>
+              <a:rPr lang="en-US" altLang="en-US" sz="2200" dirty="0"/>
               <a:t>InsightPilot's orchestrator turns a question into an analysis plan the analyst reviews before any query runs</a:t>
             </a:r>
           </a:p>
@@ -8096,7 +8115,7 @@
               <a:defRPr/>
             </a:pPr>
             <a:r>
-              <a:rPr lang="en-US" altLang="en-US" dirty="0"/>
+              <a:rPr lang="en-US" altLang="en-US" sz="2200" dirty="0"/>
               <a:t>Four specialist agents fetch, analyze, model and present across relational databases, spreadsheets and web services</a:t>
             </a:r>
           </a:p>
@@ -8105,7 +8124,7 @@
               <a:defRPr/>
             </a:pPr>
             <a:r>
-              <a:rPr lang="en-US" altLang="en-US" dirty="0"/>
+              <a:rPr lang="en-US" altLang="en-US" sz="2200" dirty="0"/>
               <a:t>Every step records its source, query and rows returned, and a separate check confirms it matched the plan</a:t>
             </a:r>
           </a:p>
@@ -8184,7 +8203,7 @@
         <p:spPr/>
         <p:txBody>
           <a:bodyPr>
-            <a:normAutofit fontScale="92500" lnSpcReduction="10000"/>
+            <a:noAutofit/>
           </a:bodyPr>
           <a:lstStyle/>
           <a:p>
@@ -8192,7 +8211,7 @@
               <a:defRPr/>
             </a:pPr>
             <a:r>
-              <a:rPr lang="en-US" altLang="en-US" dirty="0"/>
+              <a:rPr lang="en-US" altLang="en-US" sz="2200" dirty="0"/>
               <a:t>Multi-agent orchestration engine: plan synthesis, dispatch, and replanning when a step fails</a:t>
             </a:r>
           </a:p>
@@ -8201,7 +8220,7 @@
               <a:defRPr/>
             </a:pPr>
             <a:r>
-              <a:rPr lang="en-US" altLang="en-US" dirty="0"/>
+              <a:rPr lang="en-US" altLang="en-US" sz="2200" dirty="0"/>
               <a:t>Connector layer unifying PostgreSQL, CSV and Excel files, and REST web services behind one interface</a:t>
             </a:r>
           </a:p>
@@ -8210,7 +8229,7 @@
               <a:defRPr/>
             </a:pPr>
             <a:r>
-              <a:rPr lang="en-US" altLang="en-US" dirty="0"/>
+              <a:rPr lang="en-US" altLang="en-US" sz="2200" dirty="0"/>
               <a:t>Step-level verification and lineage subsystem, with exportable investigation records</a:t>
             </a:r>
           </a:p>
@@ -8219,7 +8238,7 @@
               <a:defRPr/>
             </a:pPr>
             <a:r>
-              <a:rPr lang="en-US" altLang="en-US" dirty="0"/>
+              <a:rPr lang="en-US" altLang="en-US" sz="2200" dirty="0"/>
               <a:t>Evaluation harness and fixed question set, with multi-step accuracy results published openly</a:t>
             </a:r>
           </a:p>
@@ -8228,7 +8247,7 @@
               <a:defRPr/>
             </a:pPr>
             <a:r>
-              <a:rPr lang="en-US" altLang="en-US" dirty="0"/>
+              <a:rPr lang="en-US" altLang="en-US" sz="2200" dirty="0"/>
               <a:t>Predictive modeling agent that runs when the question requires it, reporting the methods it used</a:t>
             </a:r>
           </a:p>
@@ -8315,7 +8334,7 @@
               <a:defRPr/>
             </a:pPr>
             <a:r>
-              <a:rPr lang="en-US" altLang="en-US" dirty="0"/>
+              <a:rPr lang="en-US" altLang="en-US" sz="2000" dirty="0"/>
               <a:t>Dependencies</a:t>
             </a:r>
           </a:p>
@@ -8324,7 +8343,7 @@
               <a:defRPr/>
             </a:pPr>
             <a:r>
-              <a:rPr lang="en-US" altLang="en-US" dirty="0"/>
+              <a:rPr lang="en-US" altLang="en-US" sz="1600" dirty="0"/>
               <a:t>Model access: hosted model APIs to begin with, moving later to a self-hosted open-weight model</a:t>
             </a:r>
           </a:p>
@@ -8333,7 +8352,7 @@
               <a:defRPr/>
             </a:pPr>
             <a:r>
-              <a:rPr lang="en-US" altLang="en-US" dirty="0"/>
+              <a:rPr lang="en-US" altLang="en-US" sz="1600" dirty="0"/>
               <a:t>A realistic test environment spanning relational databases, spreadsheets and web services</a:t>
             </a:r>
           </a:p>
@@ -8342,7 +8361,7 @@
               <a:defRPr/>
             </a:pPr>
             <a:r>
-              <a:rPr lang="en-US" altLang="en-US" dirty="0"/>
+              <a:rPr lang="en-US" altLang="en-US" sz="1600" dirty="0"/>
               <a:t>Enterprise analysts available to test whether checking an answer is cheaper than rebuilding it</a:t>
             </a:r>
           </a:p>
@@ -8351,7 +8370,7 @@
               <a:defRPr/>
             </a:pPr>
             <a:r>
-              <a:rPr lang="en-US" altLang="en-US" dirty="0"/>
+              <a:rPr lang="en-US" altLang="en-US" sz="2000" dirty="0"/>
               <a:t>Concerns</a:t>
             </a:r>
           </a:p>
@@ -8360,7 +8379,7 @@
               <a:defRPr/>
             </a:pPr>
             <a:r>
-              <a:rPr lang="en-US" altLang="en-US" dirty="0"/>
+              <a:rPr lang="en-US" altLang="en-US" sz="1600" dirty="0"/>
               <a:t>Multi-step data reasoning is the weakest measured capability in the field. Leading agents score roughly 15% on the DABstep hard benchmark, and errors multiply across steps</a:t>
             </a:r>
           </a:p>
@@ -8369,7 +8388,7 @@
               <a:defRPr/>
             </a:pPr>
             <a:r>
-              <a:rPr lang="en-US" altLang="en-US" dirty="0"/>
+              <a:rPr lang="en-US" altLang="en-US" sz="1600" dirty="0"/>
               <a:t>Checking an answer may cost as much as rebuilding it, which would undermine the premise. This is untested</a:t>
             </a:r>
           </a:p>
@@ -8378,7 +8397,7 @@
               <a:defRPr/>
             </a:pPr>
             <a:r>
-              <a:rPr lang="en-US" altLang="en-US" dirty="0"/>
+              <a:rPr lang="en-US" altLang="en-US" sz="1600" dirty="0"/>
               <a:t>Self-hosting inference is new ground for us. No team member has served models at scale, and compute availability is not guaranteed</a:t>
             </a:r>
           </a:p>
@@ -8387,7 +8406,7 @@
               <a:defRPr/>
             </a:pPr>
             <a:r>
-              <a:rPr lang="en-US" altLang="en-US" dirty="0"/>
+              <a:rPr lang="en-US" altLang="en-US" sz="1600" dirty="0"/>
               <a:t>Agent reliability depends on model capability, so a smaller self-hosted model may not sustain the multi-step loop</a:t>
             </a:r>
           </a:p>
